--- a/templates/weekly-report.pptx
+++ b/templates/weekly-report.pptx
@@ -3742,7 +3742,7 @@
         </p:nvSpPr>
         <p:spPr bwMode="auto">
           <a:xfrm>
-            <a:off x="5829889" y="6289595"/>
+            <a:off x="5829889" y="3600000"/>
             <a:ext cx="5848031" cy="261610"/>
           </a:xfrm>
           <a:prstGeom prst="rect">
@@ -4372,7 +4372,7 @@
         </p:nvSpPr>
         <p:spPr bwMode="auto">
           <a:xfrm>
-            <a:off x="5839352" y="6547394"/>
+            <a:off x="5839352" y="3860000"/>
             <a:ext cx="5830756" cy="261610"/>
           </a:xfrm>
           <a:prstGeom prst="rect">

--- a/templates/weekly-report.pptx
+++ b/templates/weekly-report.pptx
@@ -3742,7 +3742,7 @@
         </p:nvSpPr>
         <p:spPr bwMode="auto">
           <a:xfrm>
-            <a:off x="5829889" y="3600000"/>
+            <a:off x="5829889" y="6289595"/>
             <a:ext cx="5848031" cy="261610"/>
           </a:xfrm>
           <a:prstGeom prst="rect">
@@ -4372,7 +4372,7 @@
         </p:nvSpPr>
         <p:spPr bwMode="auto">
           <a:xfrm>
-            <a:off x="5839352" y="3860000"/>
+            <a:off x="5839352" y="6547394"/>
             <a:ext cx="5830756" cy="261610"/>
           </a:xfrm>
           <a:prstGeom prst="rect">
